--- a/fig_15/fig_15_EtalonModes.pptx
+++ b/fig_15/fig_15_EtalonModes.pptx
@@ -5,11 +5,12 @@
     <p:sldMasterId id="2147483648" r:id="rId1"/>
   </p:sldMasterIdLst>
   <p:notesMasterIdLst>
-    <p:notesMasterId r:id="rId4"/>
+    <p:notesMasterId r:id="rId5"/>
   </p:notesMasterIdLst>
   <p:sldIdLst>
     <p:sldId id="465" r:id="rId2"/>
     <p:sldId id="507" r:id="rId3"/>
+    <p:sldId id="508" r:id="rId4"/>
   </p:sldIdLst>
   <p:sldSz cx="12192000" cy="6858000"/>
   <p:notesSz cx="6858000" cy="9144000"/>
@@ -198,7 +199,7 @@
           <a:p>
             <a:fld id="{C2606220-9AFA-4FA1-9079-EA85A4A02A94}" type="datetimeFigureOut">
               <a:rPr lang="en-US" smtClean="0"/>
-              <a:t>10/10/25</a:t>
+              <a:t>12/22/25</a:t>
             </a:fld>
             <a:endParaRPr lang="en-US"/>
           </a:p>
@@ -720,6 +721,174 @@
 </p:notes>
 </file>
 
+<file path=ppt/notesSlides/notesSlide3.xml><?xml version="1.0" encoding="utf-8"?>
+<p:notes xmlns:a="http://schemas.openxmlformats.org/drawingml/2006/main" xmlns:r="http://schemas.openxmlformats.org/officeDocument/2006/relationships" xmlns:p="http://schemas.openxmlformats.org/presentationml/2006/main">
+  <p:cSld>
+    <p:spTree>
+      <p:nvGrpSpPr>
+        <p:cNvPr id="1" name="">
+          <a:extLst>
+            <a:ext uri="{FF2B5EF4-FFF2-40B4-BE49-F238E27FC236}">
+              <a16:creationId xmlns:a16="http://schemas.microsoft.com/office/drawing/2014/main" id="{A7C29F11-59D4-8B64-F7A8-A9494957C7E5}"/>
+            </a:ext>
+          </a:extLst>
+        </p:cNvPr>
+        <p:cNvGrpSpPr/>
+        <p:nvPr/>
+      </p:nvGrpSpPr>
+      <p:grpSpPr>
+        <a:xfrm>
+          <a:off x="0" y="0"/>
+          <a:ext cx="0" cy="0"/>
+          <a:chOff x="0" y="0"/>
+          <a:chExt cx="0" cy="0"/>
+        </a:xfrm>
+      </p:grpSpPr>
+      <p:sp>
+        <p:nvSpPr>
+          <p:cNvPr id="2" name="Slide Image Placeholder 1">
+            <a:extLst>
+              <a:ext uri="{FF2B5EF4-FFF2-40B4-BE49-F238E27FC236}">
+                <a16:creationId xmlns:a16="http://schemas.microsoft.com/office/drawing/2014/main" id="{9535CC2A-6E20-D15A-1885-D6A7DBD8DF83}"/>
+              </a:ext>
+            </a:extLst>
+          </p:cNvPr>
+          <p:cNvSpPr>
+            <a:spLocks noGrp="1" noRot="1" noChangeAspect="1"/>
+          </p:cNvSpPr>
+          <p:nvPr>
+            <p:ph type="sldImg"/>
+          </p:nvPr>
+        </p:nvSpPr>
+        <p:spPr/>
+      </p:sp>
+      <p:sp>
+        <p:nvSpPr>
+          <p:cNvPr id="3" name="Notes Placeholder 2">
+            <a:extLst>
+              <a:ext uri="{FF2B5EF4-FFF2-40B4-BE49-F238E27FC236}">
+                <a16:creationId xmlns:a16="http://schemas.microsoft.com/office/drawing/2014/main" id="{9DE3AE1F-367F-F8C9-6631-8DCB93AF4211}"/>
+              </a:ext>
+            </a:extLst>
+          </p:cNvPr>
+          <p:cNvSpPr>
+            <a:spLocks noGrp="1"/>
+          </p:cNvSpPr>
+          <p:nvPr>
+            <p:ph type="body" idx="1"/>
+          </p:nvPr>
+        </p:nvSpPr>
+        <p:spPr/>
+        <p:txBody>
+          <a:bodyPr/>
+          <a:lstStyle/>
+          <a:p>
+            <a:endParaRPr lang="en-US" dirty="0"/>
+          </a:p>
+        </p:txBody>
+      </p:sp>
+      <p:sp>
+        <p:nvSpPr>
+          <p:cNvPr id="4" name="Slide Number Placeholder 3">
+            <a:extLst>
+              <a:ext uri="{FF2B5EF4-FFF2-40B4-BE49-F238E27FC236}">
+                <a16:creationId xmlns:a16="http://schemas.microsoft.com/office/drawing/2014/main" id="{DE7BB07D-6C1C-5075-7CF8-55204D78C823}"/>
+              </a:ext>
+            </a:extLst>
+          </p:cNvPr>
+          <p:cNvSpPr>
+            <a:spLocks noGrp="1"/>
+          </p:cNvSpPr>
+          <p:nvPr>
+            <p:ph type="sldNum" sz="quarter" idx="5"/>
+          </p:nvPr>
+        </p:nvSpPr>
+        <p:spPr/>
+        <p:txBody>
+          <a:bodyPr/>
+          <a:lstStyle/>
+          <a:p>
+            <a:pPr marL="0" marR="0" lvl="0" indent="0" algn="r" defTabSz="914400" rtl="0" eaLnBrk="1" fontAlgn="auto" latinLnBrk="0" hangingPunct="1">
+              <a:lnSpc>
+                <a:spcPct val="100000"/>
+              </a:lnSpc>
+              <a:spcBef>
+                <a:spcPts val="0"/>
+              </a:spcBef>
+              <a:spcAft>
+                <a:spcPts val="0"/>
+              </a:spcAft>
+              <a:buClrTx/>
+              <a:buSzTx/>
+              <a:buFontTx/>
+              <a:buNone/>
+              <a:tabLst/>
+              <a:defRPr/>
+            </a:pPr>
+            <a:fld id="{591AE693-752C-4720-B6D7-D348E1F4E496}" type="slidenum">
+              <a:rPr kumimoji="0" lang="en-US" sz="1200" b="0" i="0" u="none" strike="noStrike" kern="1200" cap="none" spc="0" normalizeH="0" baseline="0" noProof="0" smtClean="0">
+                <a:ln>
+                  <a:noFill/>
+                </a:ln>
+                <a:solidFill>
+                  <a:prstClr val="black"/>
+                </a:solidFill>
+                <a:effectLst/>
+                <a:uLnTx/>
+                <a:uFillTx/>
+                <a:latin typeface="Aptos" panose="02110004020202020204"/>
+                <a:ea typeface="+mn-ea"/>
+                <a:cs typeface="+mn-cs"/>
+              </a:rPr>
+              <a:pPr marL="0" marR="0" lvl="0" indent="0" algn="r" defTabSz="914400" rtl="0" eaLnBrk="1" fontAlgn="auto" latinLnBrk="0" hangingPunct="1">
+                <a:lnSpc>
+                  <a:spcPct val="100000"/>
+                </a:lnSpc>
+                <a:spcBef>
+                  <a:spcPts val="0"/>
+                </a:spcBef>
+                <a:spcAft>
+                  <a:spcPts val="0"/>
+                </a:spcAft>
+                <a:buClrTx/>
+                <a:buSzTx/>
+                <a:buFontTx/>
+                <a:buNone/>
+                <a:tabLst/>
+                <a:defRPr/>
+              </a:pPr>
+              <a:t>3</a:t>
+            </a:fld>
+            <a:endParaRPr kumimoji="0" lang="en-US" sz="1200" b="0" i="0" u="none" strike="noStrike" kern="1200" cap="none" spc="0" normalizeH="0" baseline="0" noProof="0">
+              <a:ln>
+                <a:noFill/>
+              </a:ln>
+              <a:solidFill>
+                <a:prstClr val="black"/>
+              </a:solidFill>
+              <a:effectLst/>
+              <a:uLnTx/>
+              <a:uFillTx/>
+              <a:latin typeface="Aptos" panose="02110004020202020204"/>
+              <a:ea typeface="+mn-ea"/>
+              <a:cs typeface="+mn-cs"/>
+            </a:endParaRPr>
+          </a:p>
+        </p:txBody>
+      </p:sp>
+    </p:spTree>
+    <p:extLst>
+      <p:ext uri="{BB962C8B-B14F-4D97-AF65-F5344CB8AC3E}">
+        <p14:creationId xmlns:p14="http://schemas.microsoft.com/office/powerpoint/2010/main" val="4120965986"/>
+      </p:ext>
+    </p:extLst>
+  </p:cSld>
+  <p:clrMapOvr>
+    <a:masterClrMapping/>
+  </p:clrMapOvr>
+</p:notes>
+</file>
+
 <file path=ppt/slideLayouts/slideLayout1.xml><?xml version="1.0" encoding="utf-8"?>
 <p:sldLayout xmlns:a="http://schemas.openxmlformats.org/drawingml/2006/main" xmlns:r="http://schemas.openxmlformats.org/officeDocument/2006/relationships" xmlns:p="http://schemas.openxmlformats.org/presentationml/2006/main" type="title" preserve="1">
   <p:cSld name="Title Slide">
@@ -867,7 +1036,7 @@
           <a:p>
             <a:fld id="{A8B5E4D4-5F0F-4EDB-8383-53EA13D893D3}" type="datetimeFigureOut">
               <a:rPr lang="en-US" smtClean="0"/>
-              <a:t>10/10/25</a:t>
+              <a:t>12/22/25</a:t>
             </a:fld>
             <a:endParaRPr lang="en-US"/>
           </a:p>
@@ -1065,7 +1234,7 @@
           <a:p>
             <a:fld id="{A8B5E4D4-5F0F-4EDB-8383-53EA13D893D3}" type="datetimeFigureOut">
               <a:rPr lang="en-US" smtClean="0"/>
-              <a:t>10/10/25</a:t>
+              <a:t>12/22/25</a:t>
             </a:fld>
             <a:endParaRPr lang="en-US"/>
           </a:p>
@@ -1273,7 +1442,7 @@
           <a:p>
             <a:fld id="{A8B5E4D4-5F0F-4EDB-8383-53EA13D893D3}" type="datetimeFigureOut">
               <a:rPr lang="en-US" smtClean="0"/>
-              <a:t>10/10/25</a:t>
+              <a:t>12/22/25</a:t>
             </a:fld>
             <a:endParaRPr lang="en-US"/>
           </a:p>
@@ -1471,7 +1640,7 @@
           <a:p>
             <a:fld id="{A8B5E4D4-5F0F-4EDB-8383-53EA13D893D3}" type="datetimeFigureOut">
               <a:rPr lang="en-US" smtClean="0"/>
-              <a:t>10/10/25</a:t>
+              <a:t>12/22/25</a:t>
             </a:fld>
             <a:endParaRPr lang="en-US"/>
           </a:p>
@@ -1746,7 +1915,7 @@
           <a:p>
             <a:fld id="{A8B5E4D4-5F0F-4EDB-8383-53EA13D893D3}" type="datetimeFigureOut">
               <a:rPr lang="en-US" smtClean="0"/>
-              <a:t>10/10/25</a:t>
+              <a:t>12/22/25</a:t>
             </a:fld>
             <a:endParaRPr lang="en-US"/>
           </a:p>
@@ -2011,7 +2180,7 @@
           <a:p>
             <a:fld id="{A8B5E4D4-5F0F-4EDB-8383-53EA13D893D3}" type="datetimeFigureOut">
               <a:rPr lang="en-US" smtClean="0"/>
-              <a:t>10/10/25</a:t>
+              <a:t>12/22/25</a:t>
             </a:fld>
             <a:endParaRPr lang="en-US"/>
           </a:p>
@@ -2423,7 +2592,7 @@
           <a:p>
             <a:fld id="{A8B5E4D4-5F0F-4EDB-8383-53EA13D893D3}" type="datetimeFigureOut">
               <a:rPr lang="en-US" smtClean="0"/>
-              <a:t>10/10/25</a:t>
+              <a:t>12/22/25</a:t>
             </a:fld>
             <a:endParaRPr lang="en-US"/>
           </a:p>
@@ -2564,7 +2733,7 @@
           <a:p>
             <a:fld id="{A8B5E4D4-5F0F-4EDB-8383-53EA13D893D3}" type="datetimeFigureOut">
               <a:rPr lang="en-US" smtClean="0"/>
-              <a:t>10/10/25</a:t>
+              <a:t>12/22/25</a:t>
             </a:fld>
             <a:endParaRPr lang="en-US"/>
           </a:p>
@@ -2677,7 +2846,7 @@
           <a:p>
             <a:fld id="{A8B5E4D4-5F0F-4EDB-8383-53EA13D893D3}" type="datetimeFigureOut">
               <a:rPr lang="en-US" smtClean="0"/>
-              <a:t>10/10/25</a:t>
+              <a:t>12/22/25</a:t>
             </a:fld>
             <a:endParaRPr lang="en-US"/>
           </a:p>
@@ -2988,7 +3157,7 @@
           <a:p>
             <a:fld id="{A8B5E4D4-5F0F-4EDB-8383-53EA13D893D3}" type="datetimeFigureOut">
               <a:rPr lang="en-US" smtClean="0"/>
-              <a:t>10/10/25</a:t>
+              <a:t>12/22/25</a:t>
             </a:fld>
             <a:endParaRPr lang="en-US"/>
           </a:p>
@@ -3276,7 +3445,7 @@
           <a:p>
             <a:fld id="{A8B5E4D4-5F0F-4EDB-8383-53EA13D893D3}" type="datetimeFigureOut">
               <a:rPr lang="en-US" smtClean="0"/>
-              <a:t>10/10/25</a:t>
+              <a:t>12/22/25</a:t>
             </a:fld>
             <a:endParaRPr lang="en-US"/>
           </a:p>
@@ -3517,7 +3686,7 @@
           <a:p>
             <a:fld id="{A8B5E4D4-5F0F-4EDB-8383-53EA13D893D3}" type="datetimeFigureOut">
               <a:rPr lang="en-US" smtClean="0"/>
-              <a:t>10/10/25</a:t>
+              <a:t>12/22/25</a:t>
             </a:fld>
             <a:endParaRPr lang="en-US"/>
           </a:p>
@@ -6376,6 +6545,1554 @@
     <p:extLst>
       <p:ext uri="{BB962C8B-B14F-4D97-AF65-F5344CB8AC3E}">
         <p14:creationId xmlns:p14="http://schemas.microsoft.com/office/powerpoint/2010/main" val="1475465755"/>
+      </p:ext>
+    </p:extLst>
+  </p:cSld>
+  <p:clrMapOvr>
+    <a:masterClrMapping/>
+  </p:clrMapOvr>
+</p:sld>
+</file>
+
+<file path=ppt/slides/slide3.xml><?xml version="1.0" encoding="utf-8"?>
+<p:sld xmlns:a="http://schemas.openxmlformats.org/drawingml/2006/main" xmlns:r="http://schemas.openxmlformats.org/officeDocument/2006/relationships" xmlns:p="http://schemas.openxmlformats.org/presentationml/2006/main">
+  <p:cSld>
+    <p:spTree>
+      <p:nvGrpSpPr>
+        <p:cNvPr id="1" name="">
+          <a:extLst>
+            <a:ext uri="{FF2B5EF4-FFF2-40B4-BE49-F238E27FC236}">
+              <a16:creationId xmlns:a16="http://schemas.microsoft.com/office/drawing/2014/main" id="{719510D0-A434-4668-FFBD-28812583135F}"/>
+            </a:ext>
+          </a:extLst>
+        </p:cNvPr>
+        <p:cNvGrpSpPr/>
+        <p:nvPr/>
+      </p:nvGrpSpPr>
+      <p:grpSpPr>
+        <a:xfrm>
+          <a:off x="0" y="0"/>
+          <a:ext cx="0" cy="0"/>
+          <a:chOff x="0" y="0"/>
+          <a:chExt cx="0" cy="0"/>
+        </a:xfrm>
+      </p:grpSpPr>
+      <p:sp>
+        <p:nvSpPr>
+          <p:cNvPr id="2" name="Title 1">
+            <a:extLst>
+              <a:ext uri="{FF2B5EF4-FFF2-40B4-BE49-F238E27FC236}">
+                <a16:creationId xmlns:a16="http://schemas.microsoft.com/office/drawing/2014/main" id="{7D21AAD2-BBCA-3A26-6AD0-1C27FFA709C4}"/>
+              </a:ext>
+            </a:extLst>
+          </p:cNvPr>
+          <p:cNvSpPr>
+            <a:spLocks noGrp="1"/>
+          </p:cNvSpPr>
+          <p:nvPr>
+            <p:ph type="title"/>
+          </p:nvPr>
+        </p:nvSpPr>
+        <p:spPr>
+          <a:xfrm>
+            <a:off x="911772" y="127379"/>
+            <a:ext cx="10515600" cy="1325563"/>
+          </a:xfrm>
+        </p:spPr>
+        <p:txBody>
+          <a:bodyPr>
+            <a:normAutofit fontScale="90000"/>
+          </a:bodyPr>
+          <a:lstStyle/>
+          <a:p>
+            <a:r>
+              <a:rPr lang="en-US" dirty="0"/>
+              <a:t>TDOA Plots with a 2:1 Relationship Observed Over a Near Vertical Incidence Skywave (NVIS) Path</a:t>
+            </a:r>
+          </a:p>
+        </p:txBody>
+      </p:sp>
+      <p:grpSp>
+        <p:nvGrpSpPr>
+          <p:cNvPr id="11" name="Group 10">
+            <a:extLst>
+              <a:ext uri="{FF2B5EF4-FFF2-40B4-BE49-F238E27FC236}">
+                <a16:creationId xmlns:a16="http://schemas.microsoft.com/office/drawing/2014/main" id="{1642F84B-E453-D471-54D3-74243C24D75C}"/>
+              </a:ext>
+            </a:extLst>
+          </p:cNvPr>
+          <p:cNvGrpSpPr/>
+          <p:nvPr/>
+        </p:nvGrpSpPr>
+        <p:grpSpPr>
+          <a:xfrm>
+            <a:off x="1666695" y="2513135"/>
+            <a:ext cx="8195313" cy="2651546"/>
+            <a:chOff x="1666695" y="2513135"/>
+            <a:chExt cx="8195313" cy="2651546"/>
+          </a:xfrm>
+        </p:grpSpPr>
+        <p:sp>
+          <p:nvSpPr>
+            <p:cNvPr id="9" name="Rectangle 8">
+              <a:extLst>
+                <a:ext uri="{FF2B5EF4-FFF2-40B4-BE49-F238E27FC236}">
+                  <a16:creationId xmlns:a16="http://schemas.microsoft.com/office/drawing/2014/main" id="{3015A04E-E782-ADD2-136D-161527FAA3F0}"/>
+                </a:ext>
+              </a:extLst>
+            </p:cNvPr>
+            <p:cNvSpPr/>
+            <p:nvPr/>
+          </p:nvSpPr>
+          <p:spPr>
+            <a:xfrm>
+              <a:off x="1666695" y="2513135"/>
+              <a:ext cx="8098194" cy="2651546"/>
+            </a:xfrm>
+            <a:prstGeom prst="rect">
+              <a:avLst/>
+            </a:prstGeom>
+            <a:solidFill>
+              <a:schemeClr val="bg1"/>
+            </a:solidFill>
+            <a:ln>
+              <a:solidFill>
+                <a:schemeClr val="bg1"/>
+              </a:solidFill>
+            </a:ln>
+          </p:spPr>
+          <p:style>
+            <a:lnRef idx="2">
+              <a:schemeClr val="accent1">
+                <a:shade val="15000"/>
+              </a:schemeClr>
+            </a:lnRef>
+            <a:fillRef idx="1">
+              <a:schemeClr val="accent1"/>
+            </a:fillRef>
+            <a:effectRef idx="0">
+              <a:schemeClr val="accent1"/>
+            </a:effectRef>
+            <a:fontRef idx="minor">
+              <a:schemeClr val="lt1"/>
+            </a:fontRef>
+          </p:style>
+          <p:txBody>
+            <a:bodyPr rtlCol="0" anchor="ctr"/>
+            <a:lstStyle/>
+            <a:p>
+              <a:pPr algn="ctr"/>
+              <a:endParaRPr lang="en-US" dirty="0"/>
+            </a:p>
+          </p:txBody>
+        </p:sp>
+        <p:grpSp>
+          <p:nvGrpSpPr>
+            <p:cNvPr id="7" name="Group 6">
+              <a:extLst>
+                <a:ext uri="{FF2B5EF4-FFF2-40B4-BE49-F238E27FC236}">
+                  <a16:creationId xmlns:a16="http://schemas.microsoft.com/office/drawing/2014/main" id="{72C6C702-8F9D-1678-CD60-8FE9FF5D9625}"/>
+                </a:ext>
+              </a:extLst>
+            </p:cNvPr>
+            <p:cNvGrpSpPr/>
+            <p:nvPr/>
+          </p:nvGrpSpPr>
+          <p:grpSpPr>
+            <a:xfrm>
+              <a:off x="1666695" y="2513135"/>
+              <a:ext cx="8195313" cy="2651546"/>
+              <a:chOff x="1776423" y="2540567"/>
+              <a:chExt cx="8195313" cy="2651546"/>
+            </a:xfrm>
+          </p:grpSpPr>
+          <p:sp>
+            <p:nvSpPr>
+              <p:cNvPr id="48" name="TextBox 47">
+                <a:extLst>
+                  <a:ext uri="{FF2B5EF4-FFF2-40B4-BE49-F238E27FC236}">
+                    <a16:creationId xmlns:a16="http://schemas.microsoft.com/office/drawing/2014/main" id="{6AD0D655-BA6B-CD2A-BE1E-F7A472ACA3CA}"/>
+                  </a:ext>
+                </a:extLst>
+              </p:cNvPr>
+              <p:cNvSpPr txBox="1"/>
+              <p:nvPr/>
+            </p:nvSpPr>
+            <p:spPr>
+              <a:xfrm>
+                <a:off x="5899284" y="2888878"/>
+                <a:ext cx="4072452" cy="2031325"/>
+              </a:xfrm>
+              <a:prstGeom prst="rect">
+                <a:avLst/>
+              </a:prstGeom>
+              <a:noFill/>
+            </p:spPr>
+            <p:txBody>
+              <a:bodyPr wrap="square" rtlCol="0">
+                <a:spAutoFit/>
+              </a:bodyPr>
+              <a:lstStyle/>
+              <a:p>
+                <a:pPr>
+                  <a:defRPr/>
+                </a:pPr>
+                <a:r>
+                  <a:rPr lang="en-US" dirty="0">
+                    <a:solidFill>
+                      <a:prstClr val="black"/>
+                    </a:solidFill>
+                  </a:rPr>
+                  <a:t>Path 1F</a:t>
+                </a:r>
+                <a:r>
+                  <a:rPr lang="en-US" baseline="-25000" dirty="0">
+                    <a:solidFill>
+                      <a:prstClr val="black"/>
+                    </a:solidFill>
+                  </a:rPr>
+                  <a:t>2 </a:t>
+                </a:r>
+                <a:r>
+                  <a:rPr lang="en-US" dirty="0">
+                    <a:solidFill>
+                      <a:prstClr val="black"/>
+                    </a:solidFill>
+                  </a:rPr>
+                  <a:t>- 2F</a:t>
+                </a:r>
+                <a:r>
+                  <a:rPr lang="en-US" baseline="-25000" dirty="0">
+                    <a:solidFill>
+                      <a:prstClr val="black"/>
+                    </a:solidFill>
+                  </a:rPr>
+                  <a:t>2</a:t>
+                </a:r>
+                <a:r>
+                  <a:rPr lang="en-US" dirty="0">
+                    <a:solidFill>
+                      <a:prstClr val="black"/>
+                    </a:solidFill>
+                  </a:rPr>
+                  <a:t> :  </a:t>
+                </a:r>
+                <a:r>
+                  <a:rPr lang="en-US" dirty="0">
+                    <a:solidFill>
+                      <a:prstClr val="black"/>
+                    </a:solidFill>
+                    <a:latin typeface="Symbol" panose="05050102010706020507" pitchFamily="18" charset="2"/>
+                  </a:rPr>
+                  <a:t>D</a:t>
+                </a:r>
+                <a:r>
+                  <a:rPr lang="en-US" dirty="0">
+                    <a:solidFill>
+                      <a:prstClr val="black"/>
+                    </a:solidFill>
+                  </a:rPr>
+                  <a:t>P = 4</a:t>
+                </a:r>
+                <a:r>
+                  <a:rPr lang="en-US" dirty="0">
+                    <a:solidFill>
+                      <a:prstClr val="black"/>
+                    </a:solidFill>
+                    <a:latin typeface="Calibri" panose="020F0502020204030204" pitchFamily="34" charset="0"/>
+                    <a:ea typeface="Calibri" panose="020F0502020204030204" pitchFamily="34" charset="0"/>
+                    <a:cs typeface="Calibri" panose="020F0502020204030204" pitchFamily="34" charset="0"/>
+                  </a:rPr>
+                  <a:t>h </a:t>
+                </a:r>
+                <a:r>
+                  <a:rPr lang="en-US" dirty="0">
+                    <a:solidFill>
+                      <a:prstClr val="black"/>
+                    </a:solidFill>
+                  </a:rPr>
+                  <a:t>- 2</a:t>
+                </a:r>
+                <a:r>
+                  <a:rPr lang="en-US" dirty="0">
+                    <a:solidFill>
+                      <a:prstClr val="black"/>
+                    </a:solidFill>
+                    <a:latin typeface="Calibri" panose="020F0502020204030204" pitchFamily="34" charset="0"/>
+                    <a:ea typeface="Calibri" panose="020F0502020204030204" pitchFamily="34" charset="0"/>
+                    <a:cs typeface="Calibri" panose="020F0502020204030204" pitchFamily="34" charset="0"/>
+                  </a:rPr>
+                  <a:t>h = 2h</a:t>
+                </a:r>
+              </a:p>
+              <a:p>
+                <a:pPr>
+                  <a:defRPr/>
+                </a:pPr>
+                <a:r>
+                  <a:rPr lang="en-US" dirty="0">
+                    <a:solidFill>
+                      <a:prstClr val="black"/>
+                    </a:solidFill>
+                  </a:rPr>
+                  <a:t>Path  1F</a:t>
+                </a:r>
+                <a:r>
+                  <a:rPr lang="en-US" baseline="-25000" dirty="0">
+                    <a:solidFill>
+                      <a:prstClr val="black"/>
+                    </a:solidFill>
+                  </a:rPr>
+                  <a:t>2 </a:t>
+                </a:r>
+                <a:r>
+                  <a:rPr lang="en-US" dirty="0">
+                    <a:solidFill>
+                      <a:prstClr val="black"/>
+                    </a:solidFill>
+                  </a:rPr>
+                  <a:t>- 3F</a:t>
+                </a:r>
+                <a:r>
+                  <a:rPr lang="en-US" baseline="-25000" dirty="0">
+                    <a:solidFill>
+                      <a:prstClr val="black"/>
+                    </a:solidFill>
+                  </a:rPr>
+                  <a:t>2</a:t>
+                </a:r>
+                <a:r>
+                  <a:rPr lang="en-US" dirty="0">
+                    <a:solidFill>
+                      <a:prstClr val="black"/>
+                    </a:solidFill>
+                  </a:rPr>
+                  <a:t> :</a:t>
+                </a:r>
+                <a:r>
+                  <a:rPr lang="en-US" baseline="-25000" dirty="0">
+                    <a:solidFill>
+                      <a:prstClr val="black"/>
+                    </a:solidFill>
+                  </a:rPr>
+                  <a:t>    </a:t>
+                </a:r>
+                <a:r>
+                  <a:rPr lang="en-US" dirty="0">
+                    <a:solidFill>
+                      <a:prstClr val="black"/>
+                    </a:solidFill>
+                    <a:latin typeface="Symbol" panose="05050102010706020507" pitchFamily="18" charset="2"/>
+                  </a:rPr>
+                  <a:t>D</a:t>
+                </a:r>
+                <a:r>
+                  <a:rPr lang="en-US" dirty="0">
+                    <a:solidFill>
+                      <a:prstClr val="black"/>
+                    </a:solidFill>
+                  </a:rPr>
+                  <a:t>P = 6</a:t>
+                </a:r>
+                <a:r>
+                  <a:rPr lang="en-US" dirty="0">
+                    <a:solidFill>
+                      <a:prstClr val="black"/>
+                    </a:solidFill>
+                    <a:latin typeface="Calibri" panose="020F0502020204030204" pitchFamily="34" charset="0"/>
+                    <a:ea typeface="Calibri" panose="020F0502020204030204" pitchFamily="34" charset="0"/>
+                    <a:cs typeface="Calibri" panose="020F0502020204030204" pitchFamily="34" charset="0"/>
+                  </a:rPr>
+                  <a:t>h - 2h = 4h</a:t>
+                </a:r>
+                <a:endParaRPr kumimoji="0" lang="en-US" sz="1800" b="0" i="0" u="none" strike="noStrike" kern="1200" cap="none" spc="0" normalizeH="0" baseline="0" noProof="0" dirty="0">
+                  <a:ln>
+                    <a:noFill/>
+                  </a:ln>
+                  <a:solidFill>
+                    <a:prstClr val="black"/>
+                  </a:solidFill>
+                  <a:effectLst/>
+                  <a:uLnTx/>
+                  <a:uFillTx/>
+                  <a:latin typeface="Aptos" panose="02110004020202020204"/>
+                  <a:ea typeface="+mn-ea"/>
+                  <a:cs typeface="+mn-cs"/>
+                </a:endParaRPr>
+              </a:p>
+              <a:p>
+                <a:pPr marL="0" marR="0" lvl="0" indent="0" algn="l" defTabSz="914400" rtl="0" eaLnBrk="1" fontAlgn="auto" latinLnBrk="0" hangingPunct="1">
+                  <a:lnSpc>
+                    <a:spcPct val="100000"/>
+                  </a:lnSpc>
+                  <a:spcBef>
+                    <a:spcPts val="0"/>
+                  </a:spcBef>
+                  <a:spcAft>
+                    <a:spcPts val="0"/>
+                  </a:spcAft>
+                  <a:buClrTx/>
+                  <a:buSzTx/>
+                  <a:buFontTx/>
+                  <a:buNone/>
+                  <a:tabLst/>
+                  <a:defRPr/>
+                </a:pPr>
+                <a:endParaRPr lang="en-US" dirty="0">
+                  <a:solidFill>
+                    <a:prstClr val="black"/>
+                  </a:solidFill>
+                  <a:latin typeface="Aptos" panose="02110004020202020204"/>
+                </a:endParaRPr>
+              </a:p>
+              <a:p>
+                <a:pPr marL="0" marR="0" lvl="0" indent="0" algn="l" defTabSz="914400" rtl="0" eaLnBrk="1" fontAlgn="auto" latinLnBrk="0" hangingPunct="1">
+                  <a:lnSpc>
+                    <a:spcPct val="100000"/>
+                  </a:lnSpc>
+                  <a:spcBef>
+                    <a:spcPts val="0"/>
+                  </a:spcBef>
+                  <a:spcAft>
+                    <a:spcPts val="0"/>
+                  </a:spcAft>
+                  <a:buClrTx/>
+                  <a:buSzTx/>
+                  <a:buFontTx/>
+                  <a:buNone/>
+                  <a:tabLst/>
+                  <a:defRPr/>
+                </a:pPr>
+                <a:r>
+                  <a:rPr kumimoji="0" lang="en-US" sz="1800" b="0" i="0" u="none" strike="noStrike" kern="1200" cap="none" spc="0" normalizeH="0" baseline="0" noProof="0" dirty="0">
+                    <a:ln>
+                      <a:noFill/>
+                    </a:ln>
+                    <a:solidFill>
+                      <a:prstClr val="black"/>
+                    </a:solidFill>
+                    <a:effectLst/>
+                    <a:uLnTx/>
+                    <a:uFillTx/>
+                    <a:latin typeface="Aptos" panose="02110004020202020204"/>
+                    <a:ea typeface="+mn-ea"/>
+                    <a:cs typeface="+mn-cs"/>
+                  </a:rPr>
+                  <a:t>Path Length for 1F</a:t>
+                </a:r>
+                <a:r>
+                  <a:rPr kumimoji="0" lang="en-US" sz="1800" b="0" i="0" u="none" strike="noStrike" kern="1200" cap="none" spc="0" normalizeH="0" baseline="-25000" noProof="0" dirty="0">
+                    <a:ln>
+                      <a:noFill/>
+                    </a:ln>
+                    <a:solidFill>
+                      <a:prstClr val="black"/>
+                    </a:solidFill>
+                    <a:effectLst/>
+                    <a:uLnTx/>
+                    <a:uFillTx/>
+                    <a:latin typeface="Aptos" panose="02110004020202020204"/>
+                    <a:ea typeface="+mn-ea"/>
+                    <a:cs typeface="+mn-cs"/>
+                  </a:rPr>
+                  <a:t>2 </a:t>
+                </a:r>
+                <a:r>
+                  <a:rPr kumimoji="0" lang="en-US" sz="1800" b="0" i="0" u="none" strike="noStrike" kern="1200" cap="none" spc="0" normalizeH="0" baseline="0" noProof="0" dirty="0">
+                    <a:ln>
+                      <a:noFill/>
+                    </a:ln>
+                    <a:solidFill>
+                      <a:prstClr val="black"/>
+                    </a:solidFill>
+                    <a:effectLst/>
+                    <a:uLnTx/>
+                    <a:uFillTx/>
+                    <a:latin typeface="Aptos" panose="02110004020202020204"/>
+                    <a:ea typeface="+mn-ea"/>
+                    <a:cs typeface="+mn-cs"/>
+                  </a:rPr>
+                  <a:t>- 3F</a:t>
+                </a:r>
+                <a:r>
+                  <a:rPr kumimoji="0" lang="en-US" sz="1800" b="0" i="0" u="none" strike="noStrike" kern="1200" cap="none" spc="0" normalizeH="0" baseline="-25000" noProof="0" dirty="0">
+                    <a:ln>
+                      <a:noFill/>
+                    </a:ln>
+                    <a:solidFill>
+                      <a:prstClr val="black"/>
+                    </a:solidFill>
+                    <a:effectLst/>
+                    <a:uLnTx/>
+                    <a:uFillTx/>
+                    <a:latin typeface="Aptos" panose="02110004020202020204"/>
+                    <a:ea typeface="+mn-ea"/>
+                    <a:cs typeface="+mn-cs"/>
+                  </a:rPr>
+                  <a:t>2 </a:t>
+                </a:r>
+                <a:r>
+                  <a:rPr kumimoji="0" lang="en-US" sz="1800" b="0" i="0" u="none" strike="noStrike" kern="1200" cap="none" spc="0" normalizeH="0" baseline="0" noProof="0" dirty="0">
+                    <a:ln>
+                      <a:noFill/>
+                    </a:ln>
+                    <a:solidFill>
+                      <a:prstClr val="black"/>
+                    </a:solidFill>
+                    <a:effectLst/>
+                    <a:uLnTx/>
+                    <a:uFillTx/>
+                    <a:latin typeface="Aptos" panose="02110004020202020204"/>
+                    <a:ea typeface="+mn-ea"/>
+                    <a:cs typeface="+mn-cs"/>
+                  </a:rPr>
+                  <a:t>is exactly twice </a:t>
+                </a:r>
+                <a:r>
+                  <a:rPr kumimoji="0" lang="en-US" sz="1800" b="0" i="0" u="none" strike="noStrike" kern="1200" cap="none" spc="0" normalizeH="0" baseline="-25000" noProof="0" dirty="0">
+                    <a:ln>
+                      <a:noFill/>
+                    </a:ln>
+                    <a:solidFill>
+                      <a:prstClr val="black"/>
+                    </a:solidFill>
+                    <a:effectLst/>
+                    <a:uLnTx/>
+                    <a:uFillTx/>
+                    <a:latin typeface="Aptos" panose="02110004020202020204"/>
+                    <a:ea typeface="+mn-ea"/>
+                    <a:cs typeface="+mn-cs"/>
+                  </a:rPr>
+                  <a:t>  </a:t>
+                </a:r>
+              </a:p>
+              <a:p>
+                <a:pPr marL="0" marR="0" lvl="0" indent="0" algn="l" defTabSz="914400" rtl="0" eaLnBrk="1" fontAlgn="auto" latinLnBrk="0" hangingPunct="1">
+                  <a:lnSpc>
+                    <a:spcPct val="100000"/>
+                  </a:lnSpc>
+                  <a:spcBef>
+                    <a:spcPts val="0"/>
+                  </a:spcBef>
+                  <a:spcAft>
+                    <a:spcPts val="0"/>
+                  </a:spcAft>
+                  <a:buClrTx/>
+                  <a:buSzTx/>
+                  <a:buFontTx/>
+                  <a:buNone/>
+                  <a:tabLst/>
+                  <a:defRPr/>
+                </a:pPr>
+                <a:r>
+                  <a:rPr kumimoji="0" lang="en-US" sz="1800" b="0" i="0" u="none" strike="noStrike" kern="1200" cap="none" spc="0" normalizeH="0" baseline="0" noProof="0" dirty="0">
+                    <a:ln>
+                      <a:noFill/>
+                    </a:ln>
+                    <a:solidFill>
+                      <a:prstClr val="black"/>
+                    </a:solidFill>
+                    <a:effectLst/>
+                    <a:uLnTx/>
+                    <a:uFillTx/>
+                    <a:latin typeface="Aptos" panose="02110004020202020204"/>
+                    <a:ea typeface="+mn-ea"/>
+                    <a:cs typeface="+mn-cs"/>
+                  </a:rPr>
+                  <a:t>1F</a:t>
+                </a:r>
+                <a:r>
+                  <a:rPr kumimoji="0" lang="en-US" sz="1800" b="0" i="0" u="none" strike="noStrike" kern="1200" cap="none" spc="0" normalizeH="0" baseline="-25000" noProof="0" dirty="0">
+                    <a:ln>
+                      <a:noFill/>
+                    </a:ln>
+                    <a:solidFill>
+                      <a:prstClr val="black"/>
+                    </a:solidFill>
+                    <a:effectLst/>
+                    <a:uLnTx/>
+                    <a:uFillTx/>
+                    <a:latin typeface="Aptos" panose="02110004020202020204"/>
+                    <a:ea typeface="+mn-ea"/>
+                    <a:cs typeface="+mn-cs"/>
+                  </a:rPr>
+                  <a:t>2 </a:t>
+                </a:r>
+                <a:r>
+                  <a:rPr kumimoji="0" lang="en-US" sz="1800" b="0" i="0" u="none" strike="noStrike" kern="1200" cap="none" spc="0" normalizeH="0" baseline="0" noProof="0" dirty="0">
+                    <a:ln>
+                      <a:noFill/>
+                    </a:ln>
+                    <a:solidFill>
+                      <a:prstClr val="black"/>
+                    </a:solidFill>
+                    <a:effectLst/>
+                    <a:uLnTx/>
+                    <a:uFillTx/>
+                    <a:latin typeface="Aptos" panose="02110004020202020204"/>
+                    <a:ea typeface="+mn-ea"/>
+                    <a:cs typeface="+mn-cs"/>
+                  </a:rPr>
+                  <a:t>- 2F</a:t>
+                </a:r>
+                <a:r>
+                  <a:rPr kumimoji="0" lang="en-US" sz="1800" b="0" i="0" u="none" strike="noStrike" kern="1200" cap="none" spc="0" normalizeH="0" baseline="-25000" noProof="0" dirty="0">
+                    <a:ln>
+                      <a:noFill/>
+                    </a:ln>
+                    <a:solidFill>
+                      <a:prstClr val="black"/>
+                    </a:solidFill>
+                    <a:effectLst/>
+                    <a:uLnTx/>
+                    <a:uFillTx/>
+                    <a:latin typeface="Aptos" panose="02110004020202020204"/>
+                    <a:ea typeface="+mn-ea"/>
+                    <a:cs typeface="+mn-cs"/>
+                  </a:rPr>
+                  <a:t>2 </a:t>
+                </a:r>
+                <a:r>
+                  <a:rPr kumimoji="0" lang="en-US" sz="1800" b="0" i="0" u="none" strike="noStrike" kern="1200" cap="none" spc="0" normalizeH="0" baseline="0" noProof="0" dirty="0">
+                    <a:ln>
+                      <a:noFill/>
+                    </a:ln>
+                    <a:solidFill>
+                      <a:prstClr val="black"/>
+                    </a:solidFill>
+                    <a:effectLst/>
+                    <a:uLnTx/>
+                    <a:uFillTx/>
+                    <a:latin typeface="Aptos" panose="02110004020202020204"/>
+                    <a:ea typeface="+mn-ea"/>
+                    <a:cs typeface="+mn-cs"/>
+                  </a:rPr>
+                  <a:t>for NVIS Paths</a:t>
+                </a:r>
+                <a:r>
+                  <a:rPr lang="en-US" dirty="0">
+                    <a:solidFill>
+                      <a:prstClr val="black"/>
+                    </a:solidFill>
+                    <a:latin typeface="Aptos" panose="02110004020202020204"/>
+                  </a:rPr>
+                  <a:t> where distance between station is small compared to the layer height.</a:t>
+                </a:r>
+                <a:endParaRPr kumimoji="0" lang="en-US" sz="1800" b="0" i="0" u="none" strike="noStrike" kern="1200" cap="none" spc="0" normalizeH="0" baseline="0" noProof="0" dirty="0">
+                  <a:ln>
+                    <a:noFill/>
+                  </a:ln>
+                  <a:solidFill>
+                    <a:prstClr val="black"/>
+                  </a:solidFill>
+                  <a:effectLst/>
+                  <a:uLnTx/>
+                  <a:uFillTx/>
+                  <a:latin typeface="Aptos" panose="02110004020202020204"/>
+                  <a:ea typeface="+mn-ea"/>
+                  <a:cs typeface="+mn-cs"/>
+                </a:endParaRPr>
+              </a:p>
+            </p:txBody>
+          </p:sp>
+          <p:grpSp>
+            <p:nvGrpSpPr>
+              <p:cNvPr id="4" name="Group 3">
+                <a:extLst>
+                  <a:ext uri="{FF2B5EF4-FFF2-40B4-BE49-F238E27FC236}">
+                    <a16:creationId xmlns:a16="http://schemas.microsoft.com/office/drawing/2014/main" id="{DBBBCB0A-B002-A5CE-42A6-5BE81C51743F}"/>
+                  </a:ext>
+                </a:extLst>
+              </p:cNvPr>
+              <p:cNvGrpSpPr/>
+              <p:nvPr/>
+            </p:nvGrpSpPr>
+            <p:grpSpPr>
+              <a:xfrm>
+                <a:off x="1776423" y="2540567"/>
+                <a:ext cx="3944306" cy="2651546"/>
+                <a:chOff x="7299134" y="2274026"/>
+                <a:chExt cx="3944306" cy="2651546"/>
+              </a:xfrm>
+            </p:grpSpPr>
+            <p:sp>
+              <p:nvSpPr>
+                <p:cNvPr id="28" name="TextBox 27">
+                  <a:extLst>
+                    <a:ext uri="{FF2B5EF4-FFF2-40B4-BE49-F238E27FC236}">
+                      <a16:creationId xmlns:a16="http://schemas.microsoft.com/office/drawing/2014/main" id="{BBE6AFAA-1FDF-CE9F-AB5A-CF0CED92C3F0}"/>
+                    </a:ext>
+                  </a:extLst>
+                </p:cNvPr>
+                <p:cNvSpPr txBox="1"/>
+                <p:nvPr/>
+              </p:nvSpPr>
+              <p:spPr>
+                <a:xfrm>
+                  <a:off x="8509366" y="2274026"/>
+                  <a:ext cx="2162643" cy="369332"/>
+                </a:xfrm>
+                <a:prstGeom prst="rect">
+                  <a:avLst/>
+                </a:prstGeom>
+                <a:noFill/>
+              </p:spPr>
+              <p:txBody>
+                <a:bodyPr wrap="none" rtlCol="0">
+                  <a:spAutoFit/>
+                </a:bodyPr>
+                <a:lstStyle/>
+                <a:p>
+                  <a:pPr marL="0" marR="0" lvl="0" indent="0" algn="l" defTabSz="914400" rtl="0" eaLnBrk="1" fontAlgn="auto" latinLnBrk="0" hangingPunct="1">
+                    <a:lnSpc>
+                      <a:spcPct val="100000"/>
+                    </a:lnSpc>
+                    <a:spcBef>
+                      <a:spcPts val="0"/>
+                    </a:spcBef>
+                    <a:spcAft>
+                      <a:spcPts val="0"/>
+                    </a:spcAft>
+                    <a:buClrTx/>
+                    <a:buSzTx/>
+                    <a:buFontTx/>
+                    <a:buNone/>
+                    <a:tabLst/>
+                    <a:defRPr/>
+                  </a:pPr>
+                  <a:r>
+                    <a:rPr kumimoji="0" lang="en-US" sz="1800" b="0" i="0" u="none" strike="noStrike" kern="1200" cap="none" spc="0" normalizeH="0" baseline="0" noProof="0" dirty="0">
+                      <a:ln>
+                        <a:noFill/>
+                      </a:ln>
+                      <a:solidFill>
+                        <a:prstClr val="black"/>
+                      </a:solidFill>
+                      <a:effectLst/>
+                      <a:uLnTx/>
+                      <a:uFillTx/>
+                      <a:latin typeface="Aptos" panose="02110004020202020204"/>
+                      <a:ea typeface="+mn-ea"/>
+                      <a:cs typeface="+mn-cs"/>
+                    </a:rPr>
+                    <a:t>F</a:t>
+                  </a:r>
+                  <a:r>
+                    <a:rPr kumimoji="0" lang="en-US" sz="1800" b="0" i="0" u="none" strike="noStrike" kern="1200" cap="none" spc="0" normalizeH="0" baseline="-25000" noProof="0" dirty="0">
+                      <a:ln>
+                        <a:noFill/>
+                      </a:ln>
+                      <a:solidFill>
+                        <a:prstClr val="black"/>
+                      </a:solidFill>
+                      <a:effectLst/>
+                      <a:uLnTx/>
+                      <a:uFillTx/>
+                      <a:latin typeface="Aptos" panose="02110004020202020204"/>
+                      <a:ea typeface="+mn-ea"/>
+                      <a:cs typeface="+mn-cs"/>
+                    </a:rPr>
+                    <a:t>2</a:t>
+                  </a:r>
+                  <a:r>
+                    <a:rPr kumimoji="0" lang="en-US" sz="1800" b="0" i="0" u="none" strike="noStrike" kern="1200" cap="none" spc="0" normalizeH="0" baseline="0" noProof="0" dirty="0">
+                      <a:ln>
+                        <a:noFill/>
+                      </a:ln>
+                      <a:solidFill>
+                        <a:prstClr val="black"/>
+                      </a:solidFill>
+                      <a:effectLst/>
+                      <a:uLnTx/>
+                      <a:uFillTx/>
+                      <a:latin typeface="Aptos" panose="02110004020202020204"/>
+                      <a:ea typeface="+mn-ea"/>
+                      <a:cs typeface="+mn-cs"/>
+                    </a:rPr>
+                    <a:t> Layer at ~ 290 km</a:t>
+                  </a:r>
+                </a:p>
+              </p:txBody>
+            </p:sp>
+            <p:grpSp>
+              <p:nvGrpSpPr>
+                <p:cNvPr id="3" name="Group 2">
+                  <a:extLst>
+                    <a:ext uri="{FF2B5EF4-FFF2-40B4-BE49-F238E27FC236}">
+                      <a16:creationId xmlns:a16="http://schemas.microsoft.com/office/drawing/2014/main" id="{4A199268-AF4F-EF22-3F96-7216D4E5A8D3}"/>
+                    </a:ext>
+                  </a:extLst>
+                </p:cNvPr>
+                <p:cNvGrpSpPr/>
+                <p:nvPr/>
+              </p:nvGrpSpPr>
+              <p:grpSpPr>
+                <a:xfrm>
+                  <a:off x="7299134" y="2622337"/>
+                  <a:ext cx="3944306" cy="2303235"/>
+                  <a:chOff x="7299134" y="2622337"/>
+                  <a:chExt cx="3944306" cy="2303235"/>
+                </a:xfrm>
+              </p:grpSpPr>
+              <p:cxnSp>
+                <p:nvCxnSpPr>
+                  <p:cNvPr id="8" name="Straight Connector 7">
+                    <a:extLst>
+                      <a:ext uri="{FF2B5EF4-FFF2-40B4-BE49-F238E27FC236}">
+                        <a16:creationId xmlns:a16="http://schemas.microsoft.com/office/drawing/2014/main" id="{0CBCC38F-F7F5-1727-6CBA-4DD4623A21E3}"/>
+                      </a:ext>
+                    </a:extLst>
+                  </p:cNvPr>
+                  <p:cNvCxnSpPr>
+                    <a:cxnSpLocks/>
+                  </p:cNvCxnSpPr>
+                  <p:nvPr/>
+                </p:nvCxnSpPr>
+                <p:spPr>
+                  <a:xfrm>
+                    <a:off x="7299134" y="4593030"/>
+                    <a:ext cx="3886200" cy="0"/>
+                  </a:xfrm>
+                  <a:prstGeom prst="line">
+                    <a:avLst/>
+                  </a:prstGeom>
+                  <a:ln w="127000">
+                    <a:solidFill>
+                      <a:srgbClr val="FFC000"/>
+                    </a:solidFill>
+                  </a:ln>
+                </p:spPr>
+                <p:style>
+                  <a:lnRef idx="2">
+                    <a:schemeClr val="accent1"/>
+                  </a:lnRef>
+                  <a:fillRef idx="0">
+                    <a:schemeClr val="accent1"/>
+                  </a:fillRef>
+                  <a:effectRef idx="1">
+                    <a:schemeClr val="accent1"/>
+                  </a:effectRef>
+                  <a:fontRef idx="minor">
+                    <a:schemeClr val="tx1"/>
+                  </a:fontRef>
+                </p:style>
+              </p:cxnSp>
+              <p:cxnSp>
+                <p:nvCxnSpPr>
+                  <p:cNvPr id="10" name="Straight Connector 9">
+                    <a:extLst>
+                      <a:ext uri="{FF2B5EF4-FFF2-40B4-BE49-F238E27FC236}">
+                        <a16:creationId xmlns:a16="http://schemas.microsoft.com/office/drawing/2014/main" id="{A2C69111-7505-E012-5E97-945071DB7E40}"/>
+                      </a:ext>
+                    </a:extLst>
+                  </p:cNvPr>
+                  <p:cNvCxnSpPr>
+                    <a:cxnSpLocks/>
+                  </p:cNvCxnSpPr>
+                  <p:nvPr/>
+                </p:nvCxnSpPr>
+                <p:spPr>
+                  <a:xfrm>
+                    <a:off x="7299134" y="2659126"/>
+                    <a:ext cx="3886200" cy="0"/>
+                  </a:xfrm>
+                  <a:prstGeom prst="line">
+                    <a:avLst/>
+                  </a:prstGeom>
+                  <a:ln w="60325"/>
+                </p:spPr>
+                <p:style>
+                  <a:lnRef idx="2">
+                    <a:schemeClr val="accent1"/>
+                  </a:lnRef>
+                  <a:fillRef idx="0">
+                    <a:schemeClr val="accent1"/>
+                  </a:fillRef>
+                  <a:effectRef idx="1">
+                    <a:schemeClr val="accent1"/>
+                  </a:effectRef>
+                  <a:fontRef idx="minor">
+                    <a:schemeClr val="tx1"/>
+                  </a:fontRef>
+                </p:style>
+              </p:cxnSp>
+              <p:cxnSp>
+                <p:nvCxnSpPr>
+                  <p:cNvPr id="14" name="Straight Arrow Connector 13">
+                    <a:extLst>
+                      <a:ext uri="{FF2B5EF4-FFF2-40B4-BE49-F238E27FC236}">
+                        <a16:creationId xmlns:a16="http://schemas.microsoft.com/office/drawing/2014/main" id="{BAE6845A-80DA-5523-47C1-1D73BBD35663}"/>
+                      </a:ext>
+                    </a:extLst>
+                  </p:cNvPr>
+                  <p:cNvCxnSpPr>
+                    <a:cxnSpLocks/>
+                  </p:cNvCxnSpPr>
+                  <p:nvPr/>
+                </p:nvCxnSpPr>
+                <p:spPr>
+                  <a:xfrm flipV="1">
+                    <a:off x="8954814" y="2695913"/>
+                    <a:ext cx="168165" cy="1823541"/>
+                  </a:xfrm>
+                  <a:prstGeom prst="straightConnector1">
+                    <a:avLst/>
+                  </a:prstGeom>
+                  <a:ln>
+                    <a:solidFill>
+                      <a:srgbClr val="FF0000"/>
+                    </a:solidFill>
+                    <a:tailEnd type="triangle"/>
+                  </a:ln>
+                </p:spPr>
+                <p:style>
+                  <a:lnRef idx="2">
+                    <a:schemeClr val="accent1"/>
+                  </a:lnRef>
+                  <a:fillRef idx="0">
+                    <a:schemeClr val="accent1"/>
+                  </a:fillRef>
+                  <a:effectRef idx="1">
+                    <a:schemeClr val="accent1"/>
+                  </a:effectRef>
+                  <a:fontRef idx="minor">
+                    <a:schemeClr val="tx1"/>
+                  </a:fontRef>
+                </p:style>
+              </p:cxnSp>
+              <p:cxnSp>
+                <p:nvCxnSpPr>
+                  <p:cNvPr id="16" name="Straight Arrow Connector 15">
+                    <a:extLst>
+                      <a:ext uri="{FF2B5EF4-FFF2-40B4-BE49-F238E27FC236}">
+                        <a16:creationId xmlns:a16="http://schemas.microsoft.com/office/drawing/2014/main" id="{B346FC70-C523-0ED0-EA95-8184D98F759E}"/>
+                      </a:ext>
+                    </a:extLst>
+                  </p:cNvPr>
+                  <p:cNvCxnSpPr>
+                    <a:cxnSpLocks/>
+                  </p:cNvCxnSpPr>
+                  <p:nvPr/>
+                </p:nvCxnSpPr>
+                <p:spPr>
+                  <a:xfrm>
+                    <a:off x="9122979" y="2622337"/>
+                    <a:ext cx="252248" cy="1897117"/>
+                  </a:xfrm>
+                  <a:prstGeom prst="straightConnector1">
+                    <a:avLst/>
+                  </a:prstGeom>
+                  <a:ln>
+                    <a:solidFill>
+                      <a:srgbClr val="FF0000"/>
+                    </a:solidFill>
+                    <a:tailEnd type="triangle"/>
+                  </a:ln>
+                </p:spPr>
+                <p:style>
+                  <a:lnRef idx="2">
+                    <a:schemeClr val="accent1"/>
+                  </a:lnRef>
+                  <a:fillRef idx="0">
+                    <a:schemeClr val="accent1"/>
+                  </a:fillRef>
+                  <a:effectRef idx="1">
+                    <a:schemeClr val="accent1"/>
+                  </a:effectRef>
+                  <a:fontRef idx="minor">
+                    <a:schemeClr val="tx1"/>
+                  </a:fontRef>
+                </p:style>
+              </p:cxnSp>
+              <p:cxnSp>
+                <p:nvCxnSpPr>
+                  <p:cNvPr id="20" name="Straight Arrow Connector 19">
+                    <a:extLst>
+                      <a:ext uri="{FF2B5EF4-FFF2-40B4-BE49-F238E27FC236}">
+                        <a16:creationId xmlns:a16="http://schemas.microsoft.com/office/drawing/2014/main" id="{77FF9E4D-58A2-698E-B07A-7683CF32CC33}"/>
+                      </a:ext>
+                    </a:extLst>
+                  </p:cNvPr>
+                  <p:cNvCxnSpPr>
+                    <a:cxnSpLocks/>
+                  </p:cNvCxnSpPr>
+                  <p:nvPr/>
+                </p:nvCxnSpPr>
+                <p:spPr>
+                  <a:xfrm flipV="1">
+                    <a:off x="9401504" y="2695913"/>
+                    <a:ext cx="168165" cy="1823541"/>
+                  </a:xfrm>
+                  <a:prstGeom prst="straightConnector1">
+                    <a:avLst/>
+                  </a:prstGeom>
+                  <a:ln>
+                    <a:solidFill>
+                      <a:srgbClr val="FF0000"/>
+                    </a:solidFill>
+                    <a:prstDash val="lgDash"/>
+                    <a:tailEnd type="triangle"/>
+                  </a:ln>
+                </p:spPr>
+                <p:style>
+                  <a:lnRef idx="2">
+                    <a:schemeClr val="accent1"/>
+                  </a:lnRef>
+                  <a:fillRef idx="0">
+                    <a:schemeClr val="accent1"/>
+                  </a:fillRef>
+                  <a:effectRef idx="1">
+                    <a:schemeClr val="accent1"/>
+                  </a:effectRef>
+                  <a:fontRef idx="minor">
+                    <a:schemeClr val="tx1"/>
+                  </a:fontRef>
+                </p:style>
+              </p:cxnSp>
+              <p:cxnSp>
+                <p:nvCxnSpPr>
+                  <p:cNvPr id="21" name="Straight Arrow Connector 20">
+                    <a:extLst>
+                      <a:ext uri="{FF2B5EF4-FFF2-40B4-BE49-F238E27FC236}">
+                        <a16:creationId xmlns:a16="http://schemas.microsoft.com/office/drawing/2014/main" id="{C80EB0DA-6E9B-211B-3D33-E1D35019C971}"/>
+                      </a:ext>
+                    </a:extLst>
+                  </p:cNvPr>
+                  <p:cNvCxnSpPr>
+                    <a:cxnSpLocks/>
+                  </p:cNvCxnSpPr>
+                  <p:nvPr/>
+                </p:nvCxnSpPr>
+                <p:spPr>
+                  <a:xfrm>
+                    <a:off x="9569669" y="2622337"/>
+                    <a:ext cx="252248" cy="1897117"/>
+                  </a:xfrm>
+                  <a:prstGeom prst="straightConnector1">
+                    <a:avLst/>
+                  </a:prstGeom>
+                  <a:ln>
+                    <a:solidFill>
+                      <a:srgbClr val="FF0000"/>
+                    </a:solidFill>
+                    <a:prstDash val="lgDash"/>
+                    <a:tailEnd type="triangle"/>
+                  </a:ln>
+                </p:spPr>
+                <p:style>
+                  <a:lnRef idx="2">
+                    <a:schemeClr val="accent1"/>
+                  </a:lnRef>
+                  <a:fillRef idx="0">
+                    <a:schemeClr val="accent1"/>
+                  </a:fillRef>
+                  <a:effectRef idx="1">
+                    <a:schemeClr val="accent1"/>
+                  </a:effectRef>
+                  <a:fontRef idx="minor">
+                    <a:schemeClr val="tx1"/>
+                  </a:fontRef>
+                </p:style>
+              </p:cxnSp>
+              <p:cxnSp>
+                <p:nvCxnSpPr>
+                  <p:cNvPr id="22" name="Straight Arrow Connector 21">
+                    <a:extLst>
+                      <a:ext uri="{FF2B5EF4-FFF2-40B4-BE49-F238E27FC236}">
+                        <a16:creationId xmlns:a16="http://schemas.microsoft.com/office/drawing/2014/main" id="{EC33D655-41B7-5624-EB67-E334236B70DC}"/>
+                      </a:ext>
+                    </a:extLst>
+                  </p:cNvPr>
+                  <p:cNvCxnSpPr>
+                    <a:cxnSpLocks/>
+                  </p:cNvCxnSpPr>
+                  <p:nvPr/>
+                </p:nvCxnSpPr>
+                <p:spPr>
+                  <a:xfrm flipV="1">
+                    <a:off x="9861330" y="2695913"/>
+                    <a:ext cx="168165" cy="1823541"/>
+                  </a:xfrm>
+                  <a:prstGeom prst="straightConnector1">
+                    <a:avLst/>
+                  </a:prstGeom>
+                  <a:ln>
+                    <a:solidFill>
+                      <a:srgbClr val="FF0000"/>
+                    </a:solidFill>
+                    <a:prstDash val="dash"/>
+                    <a:tailEnd type="triangle"/>
+                  </a:ln>
+                </p:spPr>
+                <p:style>
+                  <a:lnRef idx="2">
+                    <a:schemeClr val="accent1"/>
+                  </a:lnRef>
+                  <a:fillRef idx="0">
+                    <a:schemeClr val="accent1"/>
+                  </a:fillRef>
+                  <a:effectRef idx="1">
+                    <a:schemeClr val="accent1"/>
+                  </a:effectRef>
+                  <a:fontRef idx="minor">
+                    <a:schemeClr val="tx1"/>
+                  </a:fontRef>
+                </p:style>
+              </p:cxnSp>
+              <p:cxnSp>
+                <p:nvCxnSpPr>
+                  <p:cNvPr id="23" name="Straight Arrow Connector 22">
+                    <a:extLst>
+                      <a:ext uri="{FF2B5EF4-FFF2-40B4-BE49-F238E27FC236}">
+                        <a16:creationId xmlns:a16="http://schemas.microsoft.com/office/drawing/2014/main" id="{D4652EAD-7BA9-48C5-DACF-EDC969E521DC}"/>
+                      </a:ext>
+                    </a:extLst>
+                  </p:cNvPr>
+                  <p:cNvCxnSpPr>
+                    <a:cxnSpLocks/>
+                  </p:cNvCxnSpPr>
+                  <p:nvPr/>
+                </p:nvCxnSpPr>
+                <p:spPr>
+                  <a:xfrm>
+                    <a:off x="10029495" y="2622337"/>
+                    <a:ext cx="252248" cy="1897117"/>
+                  </a:xfrm>
+                  <a:prstGeom prst="straightConnector1">
+                    <a:avLst/>
+                  </a:prstGeom>
+                  <a:ln>
+                    <a:solidFill>
+                      <a:srgbClr val="FF0000"/>
+                    </a:solidFill>
+                    <a:prstDash val="dash"/>
+                    <a:tailEnd type="triangle"/>
+                  </a:ln>
+                </p:spPr>
+                <p:style>
+                  <a:lnRef idx="2">
+                    <a:schemeClr val="accent1"/>
+                  </a:lnRef>
+                  <a:fillRef idx="0">
+                    <a:schemeClr val="accent1"/>
+                  </a:fillRef>
+                  <a:effectRef idx="1">
+                    <a:schemeClr val="accent1"/>
+                  </a:effectRef>
+                  <a:fontRef idx="minor">
+                    <a:schemeClr val="tx1"/>
+                  </a:fontRef>
+                </p:style>
+              </p:cxnSp>
+              <p:sp>
+                <p:nvSpPr>
+                  <p:cNvPr id="26" name="TextBox 25">
+                    <a:extLst>
+                      <a:ext uri="{FF2B5EF4-FFF2-40B4-BE49-F238E27FC236}">
+                        <a16:creationId xmlns:a16="http://schemas.microsoft.com/office/drawing/2014/main" id="{7B41306D-C64D-8230-326B-59C67AE48DFE}"/>
+                      </a:ext>
+                    </a:extLst>
+                  </p:cNvPr>
+                  <p:cNvSpPr txBox="1"/>
+                  <p:nvPr/>
+                </p:nvSpPr>
+                <p:spPr>
+                  <a:xfrm>
+                    <a:off x="9088925" y="4556240"/>
+                    <a:ext cx="1584088" cy="369332"/>
+                  </a:xfrm>
+                  <a:prstGeom prst="rect">
+                    <a:avLst/>
+                  </a:prstGeom>
+                  <a:noFill/>
+                </p:spPr>
+                <p:txBody>
+                  <a:bodyPr wrap="none" rtlCol="0">
+                    <a:spAutoFit/>
+                  </a:bodyPr>
+                  <a:lstStyle/>
+                  <a:p>
+                    <a:pPr marL="0" marR="0" lvl="0" indent="0" algn="l" defTabSz="914400" rtl="0" eaLnBrk="1" fontAlgn="auto" latinLnBrk="0" hangingPunct="1">
+                      <a:lnSpc>
+                        <a:spcPct val="100000"/>
+                      </a:lnSpc>
+                      <a:spcBef>
+                        <a:spcPts val="0"/>
+                      </a:spcBef>
+                      <a:spcAft>
+                        <a:spcPts val="0"/>
+                      </a:spcAft>
+                      <a:buClrTx/>
+                      <a:buSzTx/>
+                      <a:buFontTx/>
+                      <a:buNone/>
+                      <a:tabLst/>
+                      <a:defRPr/>
+                    </a:pPr>
+                    <a:r>
+                      <a:rPr kumimoji="0" lang="en-US" sz="1800" b="0" i="0" u="none" strike="noStrike" kern="1200" cap="none" spc="0" normalizeH="0" baseline="0" noProof="0" dirty="0">
+                        <a:ln>
+                          <a:noFill/>
+                        </a:ln>
+                        <a:solidFill>
+                          <a:prstClr val="black"/>
+                        </a:solidFill>
+                        <a:effectLst/>
+                        <a:uLnTx/>
+                        <a:uFillTx/>
+                        <a:latin typeface="Aptos" panose="02110004020202020204"/>
+                        <a:ea typeface="+mn-ea"/>
+                        <a:cs typeface="+mn-cs"/>
+                      </a:rPr>
+                      <a:t>1F</a:t>
+                    </a:r>
+                    <a:r>
+                      <a:rPr kumimoji="0" lang="en-US" sz="1800" b="0" i="0" u="none" strike="noStrike" kern="1200" cap="none" spc="0" normalizeH="0" baseline="-25000" noProof="0" dirty="0">
+                        <a:ln>
+                          <a:noFill/>
+                        </a:ln>
+                        <a:solidFill>
+                          <a:prstClr val="black"/>
+                        </a:solidFill>
+                        <a:effectLst/>
+                        <a:uLnTx/>
+                        <a:uFillTx/>
+                        <a:latin typeface="Aptos" panose="02110004020202020204"/>
+                        <a:ea typeface="+mn-ea"/>
+                        <a:cs typeface="+mn-cs"/>
+                      </a:rPr>
+                      <a:t>2</a:t>
+                    </a:r>
+                    <a:r>
+                      <a:rPr kumimoji="0" lang="en-US" sz="1800" b="0" i="0" u="none" strike="noStrike" kern="1200" cap="none" spc="0" normalizeH="0" baseline="0" noProof="0" dirty="0">
+                        <a:ln>
+                          <a:noFill/>
+                        </a:ln>
+                        <a:solidFill>
+                          <a:prstClr val="black"/>
+                        </a:solidFill>
+                        <a:effectLst/>
+                        <a:uLnTx/>
+                        <a:uFillTx/>
+                        <a:latin typeface="Aptos" panose="02110004020202020204"/>
+                        <a:ea typeface="+mn-ea"/>
+                        <a:cs typeface="+mn-cs"/>
+                      </a:rPr>
+                      <a:t>    2F</a:t>
+                    </a:r>
+                    <a:r>
+                      <a:rPr kumimoji="0" lang="en-US" sz="1800" b="0" i="0" u="none" strike="noStrike" kern="1200" cap="none" spc="0" normalizeH="0" baseline="-25000" noProof="0" dirty="0">
+                        <a:ln>
+                          <a:noFill/>
+                        </a:ln>
+                        <a:solidFill>
+                          <a:prstClr val="black"/>
+                        </a:solidFill>
+                        <a:effectLst/>
+                        <a:uLnTx/>
+                        <a:uFillTx/>
+                        <a:latin typeface="Aptos" panose="02110004020202020204"/>
+                        <a:ea typeface="+mn-ea"/>
+                        <a:cs typeface="+mn-cs"/>
+                      </a:rPr>
+                      <a:t>2</a:t>
+                    </a:r>
+                    <a:r>
+                      <a:rPr kumimoji="0" lang="en-US" sz="1800" b="0" i="0" u="none" strike="noStrike" kern="1200" cap="none" spc="0" normalizeH="0" baseline="0" noProof="0" dirty="0">
+                        <a:ln>
+                          <a:noFill/>
+                        </a:ln>
+                        <a:solidFill>
+                          <a:prstClr val="black"/>
+                        </a:solidFill>
+                        <a:effectLst/>
+                        <a:uLnTx/>
+                        <a:uFillTx/>
+                        <a:latin typeface="Aptos" panose="02110004020202020204"/>
+                        <a:ea typeface="+mn-ea"/>
+                        <a:cs typeface="+mn-cs"/>
+                      </a:rPr>
+                      <a:t>    3F</a:t>
+                    </a:r>
+                    <a:r>
+                      <a:rPr kumimoji="0" lang="en-US" sz="1800" b="0" i="0" u="none" strike="noStrike" kern="1200" cap="none" spc="0" normalizeH="0" baseline="-25000" noProof="0" dirty="0">
+                        <a:ln>
+                          <a:noFill/>
+                        </a:ln>
+                        <a:solidFill>
+                          <a:prstClr val="black"/>
+                        </a:solidFill>
+                        <a:effectLst/>
+                        <a:uLnTx/>
+                        <a:uFillTx/>
+                        <a:latin typeface="Aptos" panose="02110004020202020204"/>
+                        <a:ea typeface="+mn-ea"/>
+                        <a:cs typeface="+mn-cs"/>
+                      </a:rPr>
+                      <a:t>2</a:t>
+                    </a:r>
+                    <a:endParaRPr kumimoji="0" lang="en-US" sz="1800" b="0" i="0" u="none" strike="noStrike" kern="1200" cap="none" spc="0" normalizeH="0" baseline="0" noProof="0" dirty="0">
+                      <a:ln>
+                        <a:noFill/>
+                      </a:ln>
+                      <a:solidFill>
+                        <a:prstClr val="black"/>
+                      </a:solidFill>
+                      <a:effectLst/>
+                      <a:uLnTx/>
+                      <a:uFillTx/>
+                      <a:latin typeface="Aptos" panose="02110004020202020204"/>
+                      <a:ea typeface="+mn-ea"/>
+                      <a:cs typeface="+mn-cs"/>
+                    </a:endParaRPr>
+                  </a:p>
+                </p:txBody>
+              </p:sp>
+              <p:sp>
+                <p:nvSpPr>
+                  <p:cNvPr id="29" name="TextBox 28">
+                    <a:extLst>
+                      <a:ext uri="{FF2B5EF4-FFF2-40B4-BE49-F238E27FC236}">
+                        <a16:creationId xmlns:a16="http://schemas.microsoft.com/office/drawing/2014/main" id="{E124EE58-9D76-0B53-C79B-A7F20F14A5FE}"/>
+                      </a:ext>
+                    </a:extLst>
+                  </p:cNvPr>
+                  <p:cNvSpPr txBox="1"/>
+                  <p:nvPr/>
+                </p:nvSpPr>
+                <p:spPr>
+                  <a:xfrm>
+                    <a:off x="10527603" y="4223698"/>
+                    <a:ext cx="715837" cy="369332"/>
+                  </a:xfrm>
+                  <a:prstGeom prst="rect">
+                    <a:avLst/>
+                  </a:prstGeom>
+                  <a:noFill/>
+                </p:spPr>
+                <p:txBody>
+                  <a:bodyPr wrap="none" rtlCol="0">
+                    <a:spAutoFit/>
+                  </a:bodyPr>
+                  <a:lstStyle/>
+                  <a:p>
+                    <a:pPr marL="0" marR="0" lvl="0" indent="0" algn="r" defTabSz="914400" rtl="0" eaLnBrk="1" fontAlgn="auto" latinLnBrk="0" hangingPunct="1">
+                      <a:lnSpc>
+                        <a:spcPct val="100000"/>
+                      </a:lnSpc>
+                      <a:spcBef>
+                        <a:spcPts val="0"/>
+                      </a:spcBef>
+                      <a:spcAft>
+                        <a:spcPts val="0"/>
+                      </a:spcAft>
+                      <a:buClrTx/>
+                      <a:buSzTx/>
+                      <a:buFontTx/>
+                      <a:buNone/>
+                      <a:tabLst/>
+                      <a:defRPr/>
+                    </a:pPr>
+                    <a:r>
+                      <a:rPr kumimoji="0" lang="en-US" sz="1800" b="0" i="0" u="none" strike="noStrike" kern="1200" cap="none" spc="0" normalizeH="0" baseline="0" noProof="0" dirty="0">
+                        <a:ln>
+                          <a:noFill/>
+                        </a:ln>
+                        <a:solidFill>
+                          <a:prstClr val="black"/>
+                        </a:solidFill>
+                        <a:effectLst/>
+                        <a:uLnTx/>
+                        <a:uFillTx/>
+                        <a:latin typeface="Aptos" panose="02110004020202020204"/>
+                        <a:ea typeface="+mn-ea"/>
+                        <a:cs typeface="+mn-cs"/>
+                      </a:rPr>
+                      <a:t>Earth</a:t>
+                    </a:r>
+                  </a:p>
+                </p:txBody>
+              </p:sp>
+              <p:cxnSp>
+                <p:nvCxnSpPr>
+                  <p:cNvPr id="51" name="Straight Arrow Connector 50">
+                    <a:extLst>
+                      <a:ext uri="{FF2B5EF4-FFF2-40B4-BE49-F238E27FC236}">
+                        <a16:creationId xmlns:a16="http://schemas.microsoft.com/office/drawing/2014/main" id="{BC369999-60C6-C802-47BA-C164DEABF5CC}"/>
+                      </a:ext>
+                    </a:extLst>
+                  </p:cNvPr>
+                  <p:cNvCxnSpPr/>
+                  <p:nvPr/>
+                </p:nvCxnSpPr>
+                <p:spPr>
+                  <a:xfrm>
+                    <a:off x="7651535" y="2695913"/>
+                    <a:ext cx="0" cy="1823541"/>
+                  </a:xfrm>
+                  <a:prstGeom prst="straightConnector1">
+                    <a:avLst/>
+                  </a:prstGeom>
+                  <a:ln>
+                    <a:headEnd type="triangle"/>
+                    <a:tailEnd type="triangle"/>
+                  </a:ln>
+                </p:spPr>
+                <p:style>
+                  <a:lnRef idx="2">
+                    <a:schemeClr val="accent1"/>
+                  </a:lnRef>
+                  <a:fillRef idx="0">
+                    <a:schemeClr val="accent1"/>
+                  </a:fillRef>
+                  <a:effectRef idx="1">
+                    <a:schemeClr val="accent1"/>
+                  </a:effectRef>
+                  <a:fontRef idx="minor">
+                    <a:schemeClr val="tx1"/>
+                  </a:fontRef>
+                </p:style>
+              </p:cxnSp>
+              <p:sp>
+                <p:nvSpPr>
+                  <p:cNvPr id="52" name="TextBox 51">
+                    <a:extLst>
+                      <a:ext uri="{FF2B5EF4-FFF2-40B4-BE49-F238E27FC236}">
+                        <a16:creationId xmlns:a16="http://schemas.microsoft.com/office/drawing/2014/main" id="{F9C089BC-7D89-FEE6-4CCA-A27DBAB09E08}"/>
+                      </a:ext>
+                    </a:extLst>
+                  </p:cNvPr>
+                  <p:cNvSpPr txBox="1"/>
+                  <p:nvPr/>
+                </p:nvSpPr>
+                <p:spPr>
+                  <a:xfrm>
+                    <a:off x="7515655" y="3453810"/>
+                    <a:ext cx="311304" cy="369332"/>
+                  </a:xfrm>
+                  <a:prstGeom prst="rect">
+                    <a:avLst/>
+                  </a:prstGeom>
+                  <a:solidFill>
+                    <a:schemeClr val="bg1"/>
+                  </a:solidFill>
+                </p:spPr>
+                <p:txBody>
+                  <a:bodyPr wrap="none" rtlCol="0">
+                    <a:spAutoFit/>
+                  </a:bodyPr>
+                  <a:lstStyle/>
+                  <a:p>
+                    <a:pPr marL="0" marR="0" lvl="0" indent="0" algn="l" defTabSz="914400" rtl="0" eaLnBrk="1" fontAlgn="auto" latinLnBrk="0" hangingPunct="1">
+                      <a:lnSpc>
+                        <a:spcPct val="100000"/>
+                      </a:lnSpc>
+                      <a:spcBef>
+                        <a:spcPts val="0"/>
+                      </a:spcBef>
+                      <a:spcAft>
+                        <a:spcPts val="0"/>
+                      </a:spcAft>
+                      <a:buClrTx/>
+                      <a:buSzTx/>
+                      <a:buFontTx/>
+                      <a:buNone/>
+                      <a:tabLst/>
+                      <a:defRPr/>
+                    </a:pPr>
+                    <a:r>
+                      <a:rPr kumimoji="0" lang="en-US" sz="1800" b="0" i="0" u="none" strike="noStrike" kern="1200" cap="none" spc="0" normalizeH="0" baseline="0" noProof="0" dirty="0">
+                        <a:ln>
+                          <a:noFill/>
+                        </a:ln>
+                        <a:solidFill>
+                          <a:prstClr val="black"/>
+                        </a:solidFill>
+                        <a:effectLst/>
+                        <a:uLnTx/>
+                        <a:uFillTx/>
+                        <a:latin typeface="Calibri" panose="020F0502020204030204" pitchFamily="34" charset="0"/>
+                        <a:ea typeface="Calibri" panose="020F0502020204030204" pitchFamily="34" charset="0"/>
+                        <a:cs typeface="Calibri" panose="020F0502020204030204" pitchFamily="34" charset="0"/>
+                      </a:rPr>
+                      <a:t>h</a:t>
+                    </a:r>
+                  </a:p>
+                </p:txBody>
+              </p:sp>
+              <p:sp>
+                <p:nvSpPr>
+                  <p:cNvPr id="53" name="TextBox 52">
+                    <a:extLst>
+                      <a:ext uri="{FF2B5EF4-FFF2-40B4-BE49-F238E27FC236}">
+                        <a16:creationId xmlns:a16="http://schemas.microsoft.com/office/drawing/2014/main" id="{D7233F0F-2EF3-62F0-F9C1-29C15C8FDB36}"/>
+                      </a:ext>
+                    </a:extLst>
+                  </p:cNvPr>
+                  <p:cNvSpPr txBox="1"/>
+                  <p:nvPr/>
+                </p:nvSpPr>
+                <p:spPr>
+                  <a:xfrm>
+                    <a:off x="10460316" y="2687255"/>
+                    <a:ext cx="715837" cy="528074"/>
+                  </a:xfrm>
+                  <a:prstGeom prst="rect">
+                    <a:avLst/>
+                  </a:prstGeom>
+                  <a:noFill/>
+                </p:spPr>
+                <p:txBody>
+                  <a:bodyPr wrap="square" rtlCol="0">
+                    <a:spAutoFit/>
+                  </a:bodyPr>
+                  <a:lstStyle/>
+                  <a:p>
+                    <a:pPr marL="0" marR="0" lvl="0" indent="0" algn="ctr" defTabSz="914400" rtl="0" eaLnBrk="1" fontAlgn="auto" latinLnBrk="0" hangingPunct="1">
+                      <a:lnSpc>
+                        <a:spcPct val="100000"/>
+                      </a:lnSpc>
+                      <a:spcBef>
+                        <a:spcPts val="0"/>
+                      </a:spcBef>
+                      <a:spcAft>
+                        <a:spcPts val="0"/>
+                      </a:spcAft>
+                      <a:buClrTx/>
+                      <a:buSzTx/>
+                      <a:buFontTx/>
+                      <a:buNone/>
+                      <a:tabLst/>
+                      <a:defRPr/>
+                    </a:pPr>
+                    <a:r>
+                      <a:rPr kumimoji="0" lang="en-US" sz="1400" b="0" i="0" u="none" strike="noStrike" kern="1200" cap="none" spc="0" normalizeH="0" baseline="0" noProof="0" dirty="0">
+                        <a:ln>
+                          <a:noFill/>
+                        </a:ln>
+                        <a:solidFill>
+                          <a:prstClr val="black"/>
+                        </a:solidFill>
+                        <a:effectLst/>
+                        <a:uLnTx/>
+                        <a:uFillTx/>
+                        <a:latin typeface="Aptos" panose="02110004020202020204"/>
+                        <a:ea typeface="+mn-ea"/>
+                        <a:cs typeface="+mn-cs"/>
+                      </a:rPr>
+                      <a:t>Not to scale</a:t>
+                    </a:r>
+                  </a:p>
+                </p:txBody>
+              </p:sp>
+            </p:grpSp>
+          </p:grpSp>
+        </p:grpSp>
+      </p:grpSp>
+    </p:spTree>
+    <p:extLst>
+      <p:ext uri="{BB962C8B-B14F-4D97-AF65-F5344CB8AC3E}">
+        <p14:creationId xmlns:p14="http://schemas.microsoft.com/office/powerpoint/2010/main" val="23919496"/>
       </p:ext>
     </p:extLst>
   </p:cSld>

--- a/fig_15/fig_15_EtalonModes.pptx
+++ b/fig_15/fig_15_EtalonModes.pptx
@@ -6656,9 +6656,7 @@
               <a:schemeClr val="bg1"/>
             </a:solidFill>
             <a:ln>
-              <a:solidFill>
-                <a:schemeClr val="bg1"/>
-              </a:solidFill>
+              <a:noFill/>
             </a:ln>
           </p:spPr>
           <p:style>
